--- a/presentation/ucl_final_presentation.pptx
+++ b/presentation/ucl_final_presentation.pptx
@@ -1986,7 +1986,7 @@
       </p:grpSpPr>
       <p:pic>
         <p:nvPicPr>
-          <p:cNvPr id="2" name="Image 0" descr="/tmp/claude-0/-home-user-pgs/4a5325c7-76e4-5bb8-8cfc-4bd4c3ab42b2/scratchpad/title_bg.jpg">    </p:cNvPr>
+          <p:cNvPr id="2" name="Image 0" descr="/home/user/pgs/presentation/title_bg.jpg">    </p:cNvPr>
           <p:cNvPicPr>
             <a:picLocks noChangeAspect="1"/>
           </p:cNvPicPr>
@@ -2016,8 +2016,8 @@
         </p:nvSpPr>
         <p:spPr>
           <a:xfrm>
-            <a:off x="777240" y="987552"/>
-            <a:ext cx="7863840" cy="274320"/>
+            <a:off x="777240" y="859536"/>
+            <a:ext cx="7498080" cy="274320"/>
           </a:xfrm>
           <a:prstGeom prst="rect">
             <a:avLst/>
@@ -2041,7 +2041,7 @@
                 <a:ea typeface="Calibri" pitchFamily="34" charset="-122"/>
                 <a:cs typeface="Calibri" pitchFamily="34" charset="-120"/>
               </a:rPr>
-              <a:t>MSc Ecology and Data Science  ·  Research Project BIOS0057  ·  UCL</a:t>
+              <a:t>MSc Ecology and Data Science  ·  Research Project BIOS0057</a:t>
             </a:r>
             <a:endParaRPr lang="en-US" sz="1250" dirty="0"/>
           </a:p>
@@ -2055,8 +2055,8 @@
         </p:nvSpPr>
         <p:spPr>
           <a:xfrm>
-            <a:off x="777240" y="1389888"/>
-            <a:ext cx="7863840" cy="1783080"/>
+            <a:off x="777240" y="1280160"/>
+            <a:ext cx="6492240" cy="1645920"/>
           </a:xfrm>
           <a:prstGeom prst="rect">
             <a:avLst/>
@@ -2070,12 +2070,12 @@
           <a:p>
             <a:pPr indent="0" marL="0">
               <a:lnSpc>
-                <a:spcPts val="6200"/>
+                <a:spcPts val="5600"/>
               </a:lnSpc>
               <a:buNone/>
             </a:pPr>
             <a:r>
-              <a:rPr lang="en-US" sz="5800" b="1" dirty="0">
+              <a:rPr lang="en-US" sz="5200" b="1" dirty="0">
                 <a:solidFill>
                   <a:srgbClr val="FFFFFF"/>
                 </a:solidFill>
@@ -2085,17 +2085,17 @@
               </a:rPr>
               <a:t>Which penguin</a:t>
             </a:r>
-            <a:endParaRPr lang="en-US" sz="5800" dirty="0"/>
+            <a:endParaRPr lang="en-US" sz="5200" dirty="0"/>
           </a:p>
           <a:p>
             <a:pPr indent="0" marL="0">
               <a:lnSpc>
-                <a:spcPts val="6200"/>
+                <a:spcPts val="5600"/>
               </a:lnSpc>
               <a:buNone/>
             </a:pPr>
             <a:r>
-              <a:rPr lang="en-US" sz="5800" b="1" dirty="0">
+              <a:rPr lang="en-US" sz="5200" b="1" dirty="0">
                 <a:solidFill>
                   <a:srgbClr val="FFFFFF"/>
                 </a:solidFill>
@@ -2105,7 +2105,7 @@
               </a:rPr>
               <a:t>is this?</a:t>
             </a:r>
-            <a:endParaRPr lang="en-US" sz="5800" dirty="0"/>
+            <a:endParaRPr lang="en-US" sz="5200" dirty="0"/>
           </a:p>
         </p:txBody>
       </p:sp>
@@ -2117,8 +2117,8 @@
         </p:nvSpPr>
         <p:spPr>
           <a:xfrm>
-            <a:off x="777240" y="3346704"/>
-            <a:ext cx="7223760" cy="914400"/>
+            <a:off x="777240" y="3090672"/>
+            <a:ext cx="5806440" cy="1005840"/>
           </a:xfrm>
           <a:prstGeom prst="rect">
             <a:avLst/>
@@ -2132,12 +2132,12 @@
           <a:p>
             <a:pPr indent="0" marL="0">
               <a:lnSpc>
-                <a:spcPts val="2700"/>
+                <a:spcPts val="2600"/>
               </a:lnSpc>
               <a:buNone/>
             </a:pPr>
             <a:r>
-              <a:rPr lang="en-US" sz="1900" dirty="0">
+              <a:rPr lang="en-US" sz="1800" dirty="0">
                 <a:solidFill>
                   <a:srgbClr val="D6E4F5"/>
                 </a:solidFill>
@@ -2147,7 +2147,7 @@
               </a:rPr>
               <a:t>Automatic identification of Humboldt penguins at ZSL London Zoo — and what an honest evaluation says it can really do.</a:t>
             </a:r>
-            <a:endParaRPr lang="en-US" sz="1900" dirty="0"/>
+            <a:endParaRPr lang="en-US" sz="1800" dirty="0"/>
           </a:p>
         </p:txBody>
       </p:sp>
@@ -2159,7 +2159,7 @@
         </p:nvSpPr>
         <p:spPr>
           <a:xfrm>
-            <a:off x="777240" y="5138928"/>
+            <a:off x="777240" y="4370832"/>
             <a:ext cx="5486400" cy="384048"/>
           </a:xfrm>
           <a:prstGeom prst="rect">
@@ -2198,8 +2198,8 @@
         </p:nvSpPr>
         <p:spPr>
           <a:xfrm>
-            <a:off x="777240" y="5541264"/>
-            <a:ext cx="6858000" cy="292608"/>
+            <a:off x="777240" y="4773168"/>
+            <a:ext cx="5852160" cy="292608"/>
           </a:xfrm>
           <a:prstGeom prst="rect">
             <a:avLst/>
@@ -2223,7 +2223,7 @@
                 <a:ea typeface="Calibri" pitchFamily="34" charset="-122"/>
                 <a:cs typeface="Calibri" pitchFamily="34" charset="-120"/>
               </a:rPr>
-              <a:t>Supervisor: Robin Freeman  ·  Division of Biosciences, Faculty of Life Sciences</a:t>
+              <a:t>Supervisor: Robin Freeman  ·  Division of Biosciences, UCL</a:t>
             </a:r>
             <a:endParaRPr lang="en-US" sz="1350" dirty="0"/>
           </a:p>
@@ -2237,8 +2237,8 @@
         </p:nvSpPr>
         <p:spPr>
           <a:xfrm>
-            <a:off x="9189720" y="2075688"/>
-            <a:ext cx="137160" cy="137160"/>
+            <a:off x="777240" y="5605272"/>
+            <a:ext cx="118872" cy="118872"/>
           </a:xfrm>
           <a:prstGeom prst="ellipse">
             <a:avLst/>
@@ -2257,8 +2257,8 @@
         </p:nvSpPr>
         <p:spPr>
           <a:xfrm>
-            <a:off x="9528048" y="1819656"/>
-            <a:ext cx="2194560" cy="566928"/>
+            <a:off x="777240" y="5760720"/>
+            <a:ext cx="1920240" cy="475488"/>
           </a:xfrm>
           <a:prstGeom prst="rect">
             <a:avLst/>
@@ -2274,7 +2274,7 @@
               <a:buNone/>
             </a:pPr>
             <a:r>
-              <a:rPr lang="en-US" sz="3400" b="1" dirty="0">
+              <a:rPr lang="en-US" sz="2800" b="1" dirty="0">
                 <a:solidFill>
                   <a:srgbClr val="FFFFFF"/>
                 </a:solidFill>
@@ -2284,7 +2284,7 @@
               </a:rPr>
               <a:t>2,307</a:t>
             </a:r>
-            <a:endParaRPr lang="en-US" sz="3400" dirty="0"/>
+            <a:endParaRPr lang="en-US" sz="2800" dirty="0"/>
           </a:p>
         </p:txBody>
       </p:sp>
@@ -2296,8 +2296,8 @@
         </p:nvSpPr>
         <p:spPr>
           <a:xfrm>
-            <a:off x="9528048" y="2368296"/>
-            <a:ext cx="2194560" cy="274320"/>
+            <a:off x="777240" y="6208776"/>
+            <a:ext cx="1920240" cy="256032"/>
           </a:xfrm>
           <a:prstGeom prst="rect">
             <a:avLst/>
@@ -2313,7 +2313,7 @@
               <a:buNone/>
             </a:pPr>
             <a:r>
-              <a:rPr lang="en-US" sz="1250" dirty="0">
+              <a:rPr lang="en-US" sz="1200" dirty="0">
                 <a:solidFill>
                   <a:srgbClr val="AEC8E6"/>
                 </a:solidFill>
@@ -2323,7 +2323,7 @@
               </a:rPr>
               <a:t>photographs</a:t>
             </a:r>
-            <a:endParaRPr lang="en-US" sz="1250" dirty="0"/>
+            <a:endParaRPr lang="en-US" sz="1200" dirty="0"/>
           </a:p>
         </p:txBody>
       </p:sp>
@@ -2335,8 +2335,8 @@
         </p:nvSpPr>
         <p:spPr>
           <a:xfrm>
-            <a:off x="9189720" y="3218688"/>
-            <a:ext cx="137160" cy="137160"/>
+            <a:off x="2862072" y="5605272"/>
+            <a:ext cx="118872" cy="118872"/>
           </a:xfrm>
           <a:prstGeom prst="ellipse">
             <a:avLst/>
@@ -2355,8 +2355,8 @@
         </p:nvSpPr>
         <p:spPr>
           <a:xfrm>
-            <a:off x="9528048" y="2962656"/>
-            <a:ext cx="2194560" cy="566928"/>
+            <a:off x="2862072" y="5760720"/>
+            <a:ext cx="1920240" cy="475488"/>
           </a:xfrm>
           <a:prstGeom prst="rect">
             <a:avLst/>
@@ -2372,7 +2372,7 @@
               <a:buNone/>
             </a:pPr>
             <a:r>
-              <a:rPr lang="en-US" sz="3400" b="1" dirty="0">
+              <a:rPr lang="en-US" sz="2800" b="1" dirty="0">
                 <a:solidFill>
                   <a:srgbClr val="FFFFFF"/>
                 </a:solidFill>
@@ -2382,7 +2382,7 @@
               </a:rPr>
               <a:t>81</a:t>
             </a:r>
-            <a:endParaRPr lang="en-US" sz="3400" dirty="0"/>
+            <a:endParaRPr lang="en-US" sz="2800" dirty="0"/>
           </a:p>
         </p:txBody>
       </p:sp>
@@ -2394,8 +2394,8 @@
         </p:nvSpPr>
         <p:spPr>
           <a:xfrm>
-            <a:off x="9528048" y="3511296"/>
-            <a:ext cx="2194560" cy="274320"/>
+            <a:off x="2862072" y="6208776"/>
+            <a:ext cx="1920240" cy="256032"/>
           </a:xfrm>
           <a:prstGeom prst="rect">
             <a:avLst/>
@@ -2411,7 +2411,7 @@
               <a:buNone/>
             </a:pPr>
             <a:r>
-              <a:rPr lang="en-US" sz="1250" dirty="0">
+              <a:rPr lang="en-US" sz="1200" dirty="0">
                 <a:solidFill>
                   <a:srgbClr val="AEC8E6"/>
                 </a:solidFill>
@@ -2421,7 +2421,7 @@
               </a:rPr>
               <a:t>individuals</a:t>
             </a:r>
-            <a:endParaRPr lang="en-US" sz="1250" dirty="0"/>
+            <a:endParaRPr lang="en-US" sz="1200" dirty="0"/>
           </a:p>
         </p:txBody>
       </p:sp>
@@ -2433,8 +2433,8 @@
         </p:nvSpPr>
         <p:spPr>
           <a:xfrm>
-            <a:off x="9189720" y="4361688"/>
-            <a:ext cx="137160" cy="137160"/>
+            <a:off x="4946904" y="5605272"/>
+            <a:ext cx="118872" cy="118872"/>
           </a:xfrm>
           <a:prstGeom prst="ellipse">
             <a:avLst/>
@@ -2453,8 +2453,8 @@
         </p:nvSpPr>
         <p:spPr>
           <a:xfrm>
-            <a:off x="9528048" y="4105656"/>
-            <a:ext cx="2194560" cy="566928"/>
+            <a:off x="4946904" y="5760720"/>
+            <a:ext cx="1920240" cy="475488"/>
           </a:xfrm>
           <a:prstGeom prst="rect">
             <a:avLst/>
@@ -2470,7 +2470,7 @@
               <a:buNone/>
             </a:pPr>
             <a:r>
-              <a:rPr lang="en-US" sz="3400" b="1" dirty="0">
+              <a:rPr lang="en-US" sz="2800" b="1" dirty="0">
                 <a:solidFill>
                   <a:srgbClr val="FFFFFF"/>
                 </a:solidFill>
@@ -2480,7 +2480,7 @@
               </a:rPr>
               <a:t>335</a:t>
             </a:r>
-            <a:endParaRPr lang="en-US" sz="3400" dirty="0"/>
+            <a:endParaRPr lang="en-US" sz="2800" dirty="0"/>
           </a:p>
         </p:txBody>
       </p:sp>
@@ -2492,8 +2492,8 @@
         </p:nvSpPr>
         <p:spPr>
           <a:xfrm>
-            <a:off x="9528048" y="4654296"/>
-            <a:ext cx="2194560" cy="274320"/>
+            <a:off x="4946904" y="6208776"/>
+            <a:ext cx="1920240" cy="256032"/>
           </a:xfrm>
           <a:prstGeom prst="rect">
             <a:avLst/>
@@ -2509,7 +2509,7 @@
               <a:buNone/>
             </a:pPr>
             <a:r>
-              <a:rPr lang="en-US" sz="1250" dirty="0">
+              <a:rPr lang="en-US" sz="1200" dirty="0">
                 <a:solidFill>
                   <a:srgbClr val="AEC8E6"/>
                 </a:solidFill>
@@ -2519,7 +2519,7 @@
               </a:rPr>
               <a:t>capture sessions</a:t>
             </a:r>
-            <a:endParaRPr lang="en-US" sz="1250" dirty="0"/>
+            <a:endParaRPr lang="en-US" sz="1200" dirty="0"/>
           </a:p>
         </p:txBody>
       </p:sp>
@@ -3181,7 +3181,7 @@
       </p:sp>
       <p:pic>
         <p:nvPicPr>
-          <p:cNvPr id="21" name="Image 0" descr="/tmp/claude-0/-home-user-pgs/4a5325c7-76e4-5bb8-8cfc-4bd4c3ab42b2/scratchpad/fig/14_photos_vs_sessions.jpg">    </p:cNvPr>
+          <p:cNvPr id="21" name="Image 0" descr="/home/user/pgs/presentation/fig/14_photos_vs_sessions.jpg">    </p:cNvPr>
           <p:cNvPicPr>
             <a:picLocks noChangeAspect="1"/>
           </p:cNvPicPr>
@@ -3556,7 +3556,7 @@
       </p:sp>
       <p:pic>
         <p:nvPicPr>
-          <p:cNvPr id="10" name="Image 0" descr="/tmp/claude-0/-home-user-pgs/4a5325c7-76e4-5bb8-8cfc-4bd4c3ab42b2/scratchpad/fig/13_colony_sessions_per_individual.jpg">    </p:cNvPr>
+          <p:cNvPr id="10" name="Image 0" descr="/home/user/pgs/presentation/fig/13_colony_sessions_per_individual.jpg">    </p:cNvPr>
           <p:cNvPicPr>
             <a:picLocks noChangeAspect="1"/>
           </p:cNvPicPr>
@@ -5079,7 +5079,7 @@
         </p:nvSpPr>
         <p:spPr>
           <a:xfrm>
-            <a:off x="777240" y="2619756"/>
+            <a:off x="777240" y="2546604"/>
             <a:ext cx="118872" cy="118872"/>
           </a:xfrm>
           <a:prstGeom prst="ellipse">
@@ -5099,8 +5099,8 @@
         </p:nvSpPr>
         <p:spPr>
           <a:xfrm>
-            <a:off x="1088136" y="2496312"/>
-            <a:ext cx="5449824" cy="1097280"/>
+            <a:off x="1088136" y="2423160"/>
+            <a:ext cx="5449824" cy="1024128"/>
           </a:xfrm>
           <a:prstGeom prst="rect">
             <a:avLst/>
@@ -5141,7 +5141,7 @@
         </p:nvSpPr>
         <p:spPr>
           <a:xfrm>
-            <a:off x="777240" y="3717036"/>
+            <a:off x="777240" y="3570732"/>
             <a:ext cx="118872" cy="118872"/>
           </a:xfrm>
           <a:prstGeom prst="ellipse">
@@ -5161,8 +5161,8 @@
         </p:nvSpPr>
         <p:spPr>
           <a:xfrm>
-            <a:off x="1088136" y="3593592"/>
-            <a:ext cx="5449824" cy="1097280"/>
+            <a:off x="1088136" y="3447288"/>
+            <a:ext cx="5449824" cy="1024128"/>
           </a:xfrm>
           <a:prstGeom prst="rect">
             <a:avLst/>
@@ -5203,7 +5203,7 @@
         </p:nvSpPr>
         <p:spPr>
           <a:xfrm>
-            <a:off x="777240" y="4814316"/>
+            <a:off x="777240" y="4594860"/>
             <a:ext cx="118872" cy="118872"/>
           </a:xfrm>
           <a:prstGeom prst="ellipse">
@@ -5223,8 +5223,8 @@
         </p:nvSpPr>
         <p:spPr>
           <a:xfrm>
-            <a:off x="1088136" y="4690872"/>
-            <a:ext cx="5449824" cy="1097280"/>
+            <a:off x="1088136" y="4471416"/>
+            <a:ext cx="5449824" cy="1024128"/>
           </a:xfrm>
           <a:prstGeom prst="rect">
             <a:avLst/>
@@ -5259,7 +5259,7 @@
       </p:sp>
       <p:pic>
         <p:nvPicPr>
-          <p:cNvPr id="11" name="Image 0" descr="/tmp/claude-0/-home-user-pgs/4a5325c7-76e4-5bb8-8cfc-4bd4c3ab42b2/scratchpad/bands.jpg">    </p:cNvPr>
+          <p:cNvPr id="11" name="Image 0" descr="/home/user/pgs/presentation/spot1.jpg">    </p:cNvPr>
           <p:cNvPicPr>
             <a:picLocks noChangeAspect="1"/>
           </p:cNvPicPr>
@@ -5273,6 +5273,120 @@
         </p:blipFill>
         <p:spPr>
           <a:xfrm>
+            <a:off x="777240" y="5340096"/>
+            <a:ext cx="1005840" cy="1005840"/>
+          </a:xfrm>
+          <a:prstGeom prst="rect">
+            <a:avLst/>
+          </a:prstGeom>
+        </p:spPr>
+      </p:pic>
+      <p:pic>
+        <p:nvPicPr>
+          <p:cNvPr id="12" name="Image 1" descr="/home/user/pgs/presentation/spot2.jpg">    </p:cNvPr>
+          <p:cNvPicPr>
+            <a:picLocks noChangeAspect="1"/>
+          </p:cNvPicPr>
+          <p:nvPr/>
+        </p:nvPicPr>
+        <p:blipFill>
+          <a:blip r:embed="rId2"/>
+          <a:stretch>
+            <a:fillRect/>
+          </a:stretch>
+        </p:blipFill>
+        <p:spPr>
+          <a:xfrm>
+            <a:off x="1892808" y="5340096"/>
+            <a:ext cx="1005840" cy="1005840"/>
+          </a:xfrm>
+          <a:prstGeom prst="rect">
+            <a:avLst/>
+          </a:prstGeom>
+        </p:spPr>
+      </p:pic>
+      <p:pic>
+        <p:nvPicPr>
+          <p:cNvPr id="13" name="Image 2" descr="/home/user/pgs/presentation/spot3.jpg">    </p:cNvPr>
+          <p:cNvPicPr>
+            <a:picLocks noChangeAspect="1"/>
+          </p:cNvPicPr>
+          <p:nvPr/>
+        </p:nvPicPr>
+        <p:blipFill>
+          <a:blip r:embed="rId3"/>
+          <a:stretch>
+            <a:fillRect/>
+          </a:stretch>
+        </p:blipFill>
+        <p:spPr>
+          <a:xfrm>
+            <a:off x="3008376" y="5340096"/>
+            <a:ext cx="1005840" cy="1005840"/>
+          </a:xfrm>
+          <a:prstGeom prst="rect">
+            <a:avLst/>
+          </a:prstGeom>
+        </p:spPr>
+      </p:pic>
+      <p:sp>
+        <p:nvSpPr>
+          <p:cNvPr id="14" name="Text 9"/>
+          <p:cNvSpPr txBox="1"/>
+          <p:nvPr/>
+        </p:nvSpPr>
+        <p:spPr>
+          <a:xfrm>
+            <a:off x="4206240" y="5376672"/>
+            <a:ext cx="2377440" cy="932688"/>
+          </a:xfrm>
+          <a:prstGeom prst="rect">
+            <a:avLst/>
+          </a:prstGeom>
+          <a:noFill/>
+          <a:ln/>
+        </p:spPr>
+        <p:txBody>
+          <a:bodyPr wrap="square" lIns="0" tIns="0" rIns="0" bIns="0" rtlCol="0" anchor="ctr"/>
+          <a:lstStyle/>
+          <a:p>
+            <a:pPr indent="0" marL="0">
+              <a:lnSpc>
+                <a:spcPts val="1700"/>
+              </a:lnSpc>
+              <a:buNone/>
+            </a:pPr>
+            <a:r>
+              <a:rPr lang="en-US" sz="1250" i="1" dirty="0">
+                <a:solidFill>
+                  <a:srgbClr val="55534E"/>
+                </a:solidFill>
+                <a:latin typeface="Calibri" pitchFamily="34" charset="0"/>
+                <a:ea typeface="Calibri" pitchFamily="34" charset="-122"/>
+                <a:cs typeface="Calibri" pitchFamily="34" charset="-120"/>
+              </a:rPr>
+              <a:t>Ventral spot patterns: individual, stable, and already on the bird.</a:t>
+            </a:r>
+            <a:endParaRPr lang="en-US" sz="1250" dirty="0"/>
+          </a:p>
+        </p:txBody>
+      </p:sp>
+      <p:pic>
+        <p:nvPicPr>
+          <p:cNvPr id="15" name="Image 3" descr="/home/user/pgs/presentation/bands.jpg">    </p:cNvPr>
+          <p:cNvPicPr>
+            <a:picLocks noChangeAspect="1"/>
+          </p:cNvPicPr>
+          <p:nvPr/>
+        </p:nvPicPr>
+        <p:blipFill>
+          <a:blip r:embed="rId4"/>
+          <a:stretch>
+            <a:fillRect/>
+          </a:stretch>
+        </p:blipFill>
+        <p:spPr>
+          <a:xfrm>
             <a:off x="7818120" y="1554480"/>
             <a:ext cx="2697480" cy="4416552"/>
           </a:xfrm>
@@ -5283,7 +5397,7 @@
       </p:pic>
       <p:sp>
         <p:nvSpPr>
-          <p:cNvPr id="12" name="Text 9"/>
+          <p:cNvPr id="16" name="Text 10"/>
           <p:cNvSpPr txBox="1"/>
           <p:nvPr/>
         </p:nvSpPr>
@@ -5438,12 +5552,12 @@
         </p:nvSpPr>
         <p:spPr>
           <a:xfrm>
-            <a:off x="777240" y="1444752"/>
-            <a:ext cx="2542032" cy="1060704"/>
+            <a:off x="777240" y="1517904"/>
+            <a:ext cx="2286000" cy="969264"/>
           </a:xfrm>
           <a:prstGeom prst="roundRect">
             <a:avLst>
-              <a:gd name="adj" fmla="val 5172"/>
+              <a:gd name="adj" fmla="val 5660"/>
             </a:avLst>
           </a:prstGeom>
           <a:solidFill>
@@ -5460,8 +5574,8 @@
         </p:nvSpPr>
         <p:spPr>
           <a:xfrm>
-            <a:off x="978408" y="1636776"/>
-            <a:ext cx="100584" cy="100584"/>
+            <a:off x="960120" y="1691640"/>
+            <a:ext cx="91440" cy="91440"/>
           </a:xfrm>
           <a:prstGeom prst="ellipse">
             <a:avLst/>
@@ -5480,8 +5594,8 @@
         </p:nvSpPr>
         <p:spPr>
           <a:xfrm>
-            <a:off x="978408" y="1764792"/>
-            <a:ext cx="2139696" cy="457200"/>
+            <a:off x="960120" y="1810512"/>
+            <a:ext cx="1920240" cy="402336"/>
           </a:xfrm>
           <a:prstGeom prst="rect">
             <a:avLst/>
@@ -5497,7 +5611,7 @@
               <a:buNone/>
             </a:pPr>
             <a:r>
-              <a:rPr lang="en-US" sz="2700" b="1" dirty="0">
+              <a:rPr lang="en-US" sz="2300" b="1" dirty="0">
                 <a:solidFill>
                   <a:srgbClr val="24231F"/>
                 </a:solidFill>
@@ -5507,7 +5621,7 @@
               </a:rPr>
               <a:t>2,307</a:t>
             </a:r>
-            <a:endParaRPr lang="en-US" sz="2700" dirty="0"/>
+            <a:endParaRPr lang="en-US" sz="2300" dirty="0"/>
           </a:p>
         </p:txBody>
       </p:sp>
@@ -5519,8 +5633,8 @@
         </p:nvSpPr>
         <p:spPr>
           <a:xfrm>
-            <a:off x="978408" y="2194560"/>
-            <a:ext cx="2139696" cy="256032"/>
+            <a:off x="960120" y="2194560"/>
+            <a:ext cx="1920240" cy="237744"/>
           </a:xfrm>
           <a:prstGeom prst="rect">
             <a:avLst/>
@@ -5536,7 +5650,7 @@
               <a:buNone/>
             </a:pPr>
             <a:r>
-              <a:rPr lang="en-US" sz="1200" dirty="0">
+              <a:rPr lang="en-US" sz="1150" dirty="0">
                 <a:solidFill>
                   <a:srgbClr val="8A877F"/>
                 </a:solidFill>
@@ -5546,7 +5660,7 @@
               </a:rPr>
               <a:t>photographs</a:t>
             </a:r>
-            <a:endParaRPr lang="en-US" sz="1200" dirty="0"/>
+            <a:endParaRPr lang="en-US" sz="1150" dirty="0"/>
           </a:p>
         </p:txBody>
       </p:sp>
@@ -5558,12 +5672,12 @@
         </p:nvSpPr>
         <p:spPr>
           <a:xfrm>
-            <a:off x="3520440" y="1444752"/>
-            <a:ext cx="2542032" cy="1060704"/>
+            <a:off x="3246120" y="1517904"/>
+            <a:ext cx="2286000" cy="969264"/>
           </a:xfrm>
           <a:prstGeom prst="roundRect">
             <a:avLst>
-              <a:gd name="adj" fmla="val 5172"/>
+              <a:gd name="adj" fmla="val 5660"/>
             </a:avLst>
           </a:prstGeom>
           <a:solidFill>
@@ -5580,8 +5694,8 @@
         </p:nvSpPr>
         <p:spPr>
           <a:xfrm>
-            <a:off x="3721608" y="1636776"/>
-            <a:ext cx="100584" cy="100584"/>
+            <a:off x="3429000" y="1691640"/>
+            <a:ext cx="91440" cy="91440"/>
           </a:xfrm>
           <a:prstGeom prst="ellipse">
             <a:avLst/>
@@ -5600,8 +5714,8 @@
         </p:nvSpPr>
         <p:spPr>
           <a:xfrm>
-            <a:off x="3721608" y="1764792"/>
-            <a:ext cx="2139696" cy="457200"/>
+            <a:off x="3429000" y="1810512"/>
+            <a:ext cx="1920240" cy="402336"/>
           </a:xfrm>
           <a:prstGeom prst="rect">
             <a:avLst/>
@@ -5617,7 +5731,7 @@
               <a:buNone/>
             </a:pPr>
             <a:r>
-              <a:rPr lang="en-US" sz="2700" b="1" dirty="0">
+              <a:rPr lang="en-US" sz="2300" b="1" dirty="0">
                 <a:solidFill>
                   <a:srgbClr val="24231F"/>
                 </a:solidFill>
@@ -5627,7 +5741,7 @@
               </a:rPr>
               <a:t>81</a:t>
             </a:r>
-            <a:endParaRPr lang="en-US" sz="2700" dirty="0"/>
+            <a:endParaRPr lang="en-US" sz="2300" dirty="0"/>
           </a:p>
         </p:txBody>
       </p:sp>
@@ -5639,8 +5753,8 @@
         </p:nvSpPr>
         <p:spPr>
           <a:xfrm>
-            <a:off x="3721608" y="2194560"/>
-            <a:ext cx="2139696" cy="256032"/>
+            <a:off x="3429000" y="2194560"/>
+            <a:ext cx="1920240" cy="237744"/>
           </a:xfrm>
           <a:prstGeom prst="rect">
             <a:avLst/>
@@ -5656,7 +5770,7 @@
               <a:buNone/>
             </a:pPr>
             <a:r>
-              <a:rPr lang="en-US" sz="1200" dirty="0">
+              <a:rPr lang="en-US" sz="1150" dirty="0">
                 <a:solidFill>
                   <a:srgbClr val="8A877F"/>
                 </a:solidFill>
@@ -5666,7 +5780,7 @@
               </a:rPr>
               <a:t>individuals</a:t>
             </a:r>
-            <a:endParaRPr lang="en-US" sz="1200" dirty="0"/>
+            <a:endParaRPr lang="en-US" sz="1150" dirty="0"/>
           </a:p>
         </p:txBody>
       </p:sp>
@@ -5678,12 +5792,12 @@
         </p:nvSpPr>
         <p:spPr>
           <a:xfrm>
-            <a:off x="6263640" y="1444752"/>
-            <a:ext cx="2542032" cy="1060704"/>
+            <a:off x="777240" y="2578608"/>
+            <a:ext cx="2286000" cy="969264"/>
           </a:xfrm>
           <a:prstGeom prst="roundRect">
             <a:avLst>
-              <a:gd name="adj" fmla="val 5172"/>
+              <a:gd name="adj" fmla="val 5660"/>
             </a:avLst>
           </a:prstGeom>
           <a:solidFill>
@@ -5700,8 +5814,8 @@
         </p:nvSpPr>
         <p:spPr>
           <a:xfrm>
-            <a:off x="6464808" y="1636776"/>
-            <a:ext cx="100584" cy="100584"/>
+            <a:off x="960120" y="2752344"/>
+            <a:ext cx="91440" cy="91440"/>
           </a:xfrm>
           <a:prstGeom prst="ellipse">
             <a:avLst/>
@@ -5720,8 +5834,8 @@
         </p:nvSpPr>
         <p:spPr>
           <a:xfrm>
-            <a:off x="6464808" y="1764792"/>
-            <a:ext cx="2139696" cy="457200"/>
+            <a:off x="960120" y="2871216"/>
+            <a:ext cx="1920240" cy="402336"/>
           </a:xfrm>
           <a:prstGeom prst="rect">
             <a:avLst/>
@@ -5737,7 +5851,7 @@
               <a:buNone/>
             </a:pPr>
             <a:r>
-              <a:rPr lang="en-US" sz="2700" b="1" dirty="0">
+              <a:rPr lang="en-US" sz="2300" b="1" dirty="0">
                 <a:solidFill>
                   <a:srgbClr val="24231F"/>
                 </a:solidFill>
@@ -5747,7 +5861,7 @@
               </a:rPr>
               <a:t>1 → 291</a:t>
             </a:r>
-            <a:endParaRPr lang="en-US" sz="2700" dirty="0"/>
+            <a:endParaRPr lang="en-US" sz="2300" dirty="0"/>
           </a:p>
         </p:txBody>
       </p:sp>
@@ -5759,8 +5873,8 @@
         </p:nvSpPr>
         <p:spPr>
           <a:xfrm>
-            <a:off x="6464808" y="2194560"/>
-            <a:ext cx="2139696" cy="256032"/>
+            <a:off x="960120" y="3255264"/>
+            <a:ext cx="1920240" cy="237744"/>
           </a:xfrm>
           <a:prstGeom prst="rect">
             <a:avLst/>
@@ -5776,7 +5890,7 @@
               <a:buNone/>
             </a:pPr>
             <a:r>
-              <a:rPr lang="en-US" sz="1200" dirty="0">
+              <a:rPr lang="en-US" sz="1150" dirty="0">
                 <a:solidFill>
                   <a:srgbClr val="8A877F"/>
                 </a:solidFill>
@@ -5786,7 +5900,7 @@
               </a:rPr>
               <a:t>photographs per bird</a:t>
             </a:r>
-            <a:endParaRPr lang="en-US" sz="1200" dirty="0"/>
+            <a:endParaRPr lang="en-US" sz="1150" dirty="0"/>
           </a:p>
         </p:txBody>
       </p:sp>
@@ -5798,12 +5912,12 @@
         </p:nvSpPr>
         <p:spPr>
           <a:xfrm>
-            <a:off x="9006840" y="1444752"/>
-            <a:ext cx="2542032" cy="1060704"/>
+            <a:off x="3246120" y="2578608"/>
+            <a:ext cx="2286000" cy="969264"/>
           </a:xfrm>
           <a:prstGeom prst="roundRect">
             <a:avLst>
-              <a:gd name="adj" fmla="val 5172"/>
+              <a:gd name="adj" fmla="val 5660"/>
             </a:avLst>
           </a:prstGeom>
           <a:solidFill>
@@ -5820,8 +5934,8 @@
         </p:nvSpPr>
         <p:spPr>
           <a:xfrm>
-            <a:off x="9208008" y="1636776"/>
-            <a:ext cx="100584" cy="100584"/>
+            <a:off x="3429000" y="2752344"/>
+            <a:ext cx="91440" cy="91440"/>
           </a:xfrm>
           <a:prstGeom prst="ellipse">
             <a:avLst/>
@@ -5840,8 +5954,8 @@
         </p:nvSpPr>
         <p:spPr>
           <a:xfrm>
-            <a:off x="9208008" y="1764792"/>
-            <a:ext cx="2139696" cy="457200"/>
+            <a:off x="3429000" y="2871216"/>
+            <a:ext cx="1920240" cy="402336"/>
           </a:xfrm>
           <a:prstGeom prst="rect">
             <a:avLst/>
@@ -5857,7 +5971,7 @@
               <a:buNone/>
             </a:pPr>
             <a:r>
-              <a:rPr lang="en-US" sz="2700" b="1" dirty="0">
+              <a:rPr lang="en-US" sz="2300" b="1" dirty="0">
                 <a:solidFill>
                   <a:srgbClr val="24231F"/>
                 </a:solidFill>
@@ -5867,7 +5981,7 @@
               </a:rPr>
               <a:t>335</a:t>
             </a:r>
-            <a:endParaRPr lang="en-US" sz="2700" dirty="0"/>
+            <a:endParaRPr lang="en-US" sz="2300" dirty="0"/>
           </a:p>
         </p:txBody>
       </p:sp>
@@ -5879,8 +5993,8 @@
         </p:nvSpPr>
         <p:spPr>
           <a:xfrm>
-            <a:off x="9208008" y="2194560"/>
-            <a:ext cx="2139696" cy="256032"/>
+            <a:off x="3429000" y="3255264"/>
+            <a:ext cx="1920240" cy="237744"/>
           </a:xfrm>
           <a:prstGeom prst="rect">
             <a:avLst/>
@@ -5896,7 +6010,7 @@
               <a:buNone/>
             </a:pPr>
             <a:r>
-              <a:rPr lang="en-US" sz="1200" dirty="0">
+              <a:rPr lang="en-US" sz="1150" dirty="0">
                 <a:solidFill>
                   <a:srgbClr val="8A877F"/>
                 </a:solidFill>
@@ -5906,106 +6020,13 @@
               </a:rPr>
               <a:t>capture sessions</a:t>
             </a:r>
-            <a:endParaRPr lang="en-US" sz="1200" dirty="0"/>
-          </a:p>
-        </p:txBody>
-      </p:sp>
-      <p:sp>
-        <p:nvSpPr>
-          <p:cNvPr id="20" name="Text 18"/>
-          <p:cNvSpPr txBox="1"/>
-          <p:nvPr/>
-        </p:nvSpPr>
-        <p:spPr>
-          <a:xfrm>
-            <a:off x="777240" y="2670048"/>
-            <a:ext cx="10637215" cy="822960"/>
-          </a:xfrm>
-          <a:prstGeom prst="rect">
-            <a:avLst/>
-          </a:prstGeom>
-          <a:noFill/>
-          <a:ln/>
-        </p:spPr>
-        <p:txBody>
-          <a:bodyPr wrap="square" lIns="0" tIns="0" rIns="0" bIns="0" rtlCol="0" anchor="t"/>
-          <a:lstStyle/>
-          <a:p>
-            <a:pPr indent="0" marL="0">
-              <a:lnSpc>
-                <a:spcPts val="2100"/>
-              </a:lnSpc>
-              <a:buNone/>
-            </a:pPr>
-            <a:r>
-              <a:rPr lang="en-US" sz="1450" dirty="0">
-                <a:solidFill>
-                  <a:srgbClr val="24231F"/>
-                </a:solidFill>
-                <a:latin typeface="Calibri" pitchFamily="34" charset="0"/>
-                <a:ea typeface="Calibri" pitchFamily="34" charset="-122"/>
-                <a:cs typeface="Calibri" pitchFamily="34" charset="-120"/>
-              </a:rPr>
-              <a:t>Taken by volunteers during routine husbandry — no protocol, no fixed viewpoint, no schedule. </a:t>
-            </a:r>
-            <a:pPr indent="0" marL="0">
-              <a:lnSpc>
-                <a:spcPts val="2100"/>
-              </a:lnSpc>
-              <a:buNone/>
-            </a:pPr>
-            <a:r>
-              <a:rPr lang="en-US" sz="1450" dirty="0">
-                <a:solidFill>
-                  <a:srgbClr val="55534E"/>
-                </a:solidFill>
-                <a:latin typeface="Calibri" pitchFamily="34" charset="0"/>
-                <a:ea typeface="Calibri" pitchFamily="34" charset="-122"/>
-                <a:cs typeface="Calibri" pitchFamily="34" charset="-120"/>
-              </a:rPr>
-              <a:t>Two inclusion thresholds leave the </a:t>
-            </a:r>
-            <a:pPr indent="0" marL="0">
-              <a:lnSpc>
-                <a:spcPts val="2100"/>
-              </a:lnSpc>
-              <a:buNone/>
-            </a:pPr>
-            <a:r>
-              <a:rPr lang="en-US" sz="1450" b="1" dirty="0">
-                <a:solidFill>
-                  <a:srgbClr val="24231F"/>
-                </a:solidFill>
-                <a:latin typeface="Calibri" pitchFamily="34" charset="0"/>
-                <a:ea typeface="Calibri" pitchFamily="34" charset="-122"/>
-                <a:cs typeface="Calibri" pitchFamily="34" charset="-120"/>
-              </a:rPr>
-              <a:t>35 individuals and 1,743 photographs</a:t>
-            </a:r>
-            <a:pPr indent="0" marL="0">
-              <a:lnSpc>
-                <a:spcPts val="2100"/>
-              </a:lnSpc>
-              <a:buNone/>
-            </a:pPr>
-            <a:r>
-              <a:rPr lang="en-US" sz="1450" dirty="0">
-                <a:solidFill>
-                  <a:srgbClr val="55534E"/>
-                </a:solidFill>
-                <a:latin typeface="Calibri" pitchFamily="34" charset="0"/>
-                <a:ea typeface="Calibri" pitchFamily="34" charset="-122"/>
-                <a:cs typeface="Calibri" pitchFamily="34" charset="-120"/>
-              </a:rPr>
-              <a:t> behind every number here.</a:t>
-            </a:r>
-            <a:endParaRPr lang="en-US" sz="1450" dirty="0"/>
+            <a:endParaRPr lang="en-US" sz="1150" dirty="0"/>
           </a:p>
         </p:txBody>
       </p:sp>
       <p:pic>
         <p:nvPicPr>
-          <p:cNvPr id="21" name="Image 0" descr="/tmp/claude-0/-home-user-pgs/4a5325c7-76e4-5bb8-8cfc-4bd4c3ab42b2/scratchpad/fig/05_dataset_distribution.jpg">    </p:cNvPr>
+          <p:cNvPr id="20" name="Image 0" descr="/home/user/pgs/presentation/fig/05_dataset_distribution.jpg">    </p:cNvPr>
           <p:cNvPicPr>
             <a:picLocks noChangeAspect="1"/>
           </p:cNvPicPr>
@@ -6019,14 +6040,353 @@
         </p:blipFill>
         <p:spPr>
           <a:xfrm>
-            <a:off x="1889608" y="3529584"/>
-            <a:ext cx="8412480" cy="2856037"/>
+            <a:off x="5989320" y="1572768"/>
+            <a:ext cx="5394960" cy="1831589"/>
           </a:xfrm>
           <a:prstGeom prst="rect">
             <a:avLst/>
           </a:prstGeom>
         </p:spPr>
       </p:pic>
+      <p:sp>
+        <p:nvSpPr>
+          <p:cNvPr id="21" name="Text 18"/>
+          <p:cNvSpPr txBox="1"/>
+          <p:nvPr/>
+        </p:nvSpPr>
+        <p:spPr>
+          <a:xfrm>
+            <a:off x="5989320" y="3456432"/>
+            <a:ext cx="5394960" cy="274320"/>
+          </a:xfrm>
+          <a:prstGeom prst="rect">
+            <a:avLst/>
+          </a:prstGeom>
+          <a:noFill/>
+          <a:ln/>
+        </p:spPr>
+        <p:txBody>
+          <a:bodyPr wrap="square" lIns="0" tIns="0" rIns="0" bIns="0" rtlCol="0" anchor="t"/>
+          <a:lstStyle/>
+          <a:p>
+            <a:pPr algn="ctr" indent="0" marL="0">
+              <a:buNone/>
+            </a:pPr>
+            <a:r>
+              <a:rPr lang="en-US" sz="1100" i="1" dirty="0">
+                <a:solidFill>
+                  <a:srgbClr val="8A877F"/>
+                </a:solidFill>
+                <a:latin typeface="Calibri" pitchFamily="34" charset="0"/>
+                <a:ea typeface="Calibri" pitchFamily="34" charset="-122"/>
+                <a:cs typeface="Calibri" pitchFamily="34" charset="-120"/>
+              </a:rPr>
+              <a:t>Every colony member, sorted by photograph count — Medici holds 291.</a:t>
+            </a:r>
+            <a:endParaRPr lang="en-US" sz="1100" dirty="0"/>
+          </a:p>
+        </p:txBody>
+      </p:sp>
+      <p:sp>
+        <p:nvSpPr>
+          <p:cNvPr id="22" name="Text 19"/>
+          <p:cNvSpPr txBox="1"/>
+          <p:nvPr/>
+        </p:nvSpPr>
+        <p:spPr>
+          <a:xfrm>
+            <a:off x="777240" y="3913632"/>
+            <a:ext cx="10637215" cy="603504"/>
+          </a:xfrm>
+          <a:prstGeom prst="rect">
+            <a:avLst/>
+          </a:prstGeom>
+          <a:noFill/>
+          <a:ln/>
+        </p:spPr>
+        <p:txBody>
+          <a:bodyPr wrap="square" lIns="0" tIns="0" rIns="0" bIns="0" rtlCol="0" anchor="t"/>
+          <a:lstStyle/>
+          <a:p>
+            <a:pPr indent="0" marL="0">
+              <a:lnSpc>
+                <a:spcPts val="2100"/>
+              </a:lnSpc>
+              <a:buNone/>
+            </a:pPr>
+            <a:r>
+              <a:rPr lang="en-US" sz="1450" dirty="0">
+                <a:solidFill>
+                  <a:srgbClr val="24231F"/>
+                </a:solidFill>
+                <a:latin typeface="Calibri" pitchFamily="34" charset="0"/>
+                <a:ea typeface="Calibri" pitchFamily="34" charset="-122"/>
+                <a:cs typeface="Calibri" pitchFamily="34" charset="-120"/>
+              </a:rPr>
+              <a:t>Taken by volunteers during routine husbandry — no protocol, no fixed viewpoint, no schedule. </a:t>
+            </a:r>
+            <a:pPr indent="0" marL="0">
+              <a:lnSpc>
+                <a:spcPts val="2100"/>
+              </a:lnSpc>
+              <a:buNone/>
+            </a:pPr>
+            <a:r>
+              <a:rPr lang="en-US" sz="1450" dirty="0">
+                <a:solidFill>
+                  <a:srgbClr val="55534E"/>
+                </a:solidFill>
+                <a:latin typeface="Calibri" pitchFamily="34" charset="0"/>
+                <a:ea typeface="Calibri" pitchFamily="34" charset="-122"/>
+                <a:cs typeface="Calibri" pitchFamily="34" charset="-120"/>
+              </a:rPr>
+              <a:t>Two inclusion thresholds leave the </a:t>
+            </a:r>
+            <a:pPr indent="0" marL="0">
+              <a:lnSpc>
+                <a:spcPts val="2100"/>
+              </a:lnSpc>
+              <a:buNone/>
+            </a:pPr>
+            <a:r>
+              <a:rPr lang="en-US" sz="1450" b="1" dirty="0">
+                <a:solidFill>
+                  <a:srgbClr val="24231F"/>
+                </a:solidFill>
+                <a:latin typeface="Calibri" pitchFamily="34" charset="0"/>
+                <a:ea typeface="Calibri" pitchFamily="34" charset="-122"/>
+                <a:cs typeface="Calibri" pitchFamily="34" charset="-120"/>
+              </a:rPr>
+              <a:t>35 individuals and 1,743 photographs</a:t>
+            </a:r>
+            <a:pPr indent="0" marL="0">
+              <a:lnSpc>
+                <a:spcPts val="2100"/>
+              </a:lnSpc>
+              <a:buNone/>
+            </a:pPr>
+            <a:r>
+              <a:rPr lang="en-US" sz="1450" dirty="0">
+                <a:solidFill>
+                  <a:srgbClr val="55534E"/>
+                </a:solidFill>
+                <a:latin typeface="Calibri" pitchFamily="34" charset="0"/>
+                <a:ea typeface="Calibri" pitchFamily="34" charset="-122"/>
+                <a:cs typeface="Calibri" pitchFamily="34" charset="-120"/>
+              </a:rPr>
+              <a:t> behind every number here.</a:t>
+            </a:r>
+            <a:endParaRPr lang="en-US" sz="1450" dirty="0"/>
+          </a:p>
+        </p:txBody>
+      </p:sp>
+      <p:pic>
+        <p:nvPicPr>
+          <p:cNvPr id="23" name="Image 1" descr="/home/user/pgs/presentation/strip1.jpg">    </p:cNvPr>
+          <p:cNvPicPr>
+            <a:picLocks noChangeAspect="1"/>
+          </p:cNvPicPr>
+          <p:nvPr/>
+        </p:nvPicPr>
+        <p:blipFill>
+          <a:blip r:embed="rId2"/>
+          <a:stretch>
+            <a:fillRect/>
+          </a:stretch>
+        </p:blipFill>
+        <p:spPr>
+          <a:xfrm>
+            <a:off x="1519276" y="4590288"/>
+            <a:ext cx="1197864" cy="1535723"/>
+          </a:xfrm>
+          <a:prstGeom prst="rect">
+            <a:avLst/>
+          </a:prstGeom>
+        </p:spPr>
+      </p:pic>
+      <p:pic>
+        <p:nvPicPr>
+          <p:cNvPr id="24" name="Image 2" descr="/home/user/pgs/presentation/strip2.jpg">    </p:cNvPr>
+          <p:cNvPicPr>
+            <a:picLocks noChangeAspect="1"/>
+          </p:cNvPicPr>
+          <p:nvPr/>
+        </p:nvPicPr>
+        <p:blipFill>
+          <a:blip r:embed="rId3"/>
+          <a:stretch>
+            <a:fillRect/>
+          </a:stretch>
+        </p:blipFill>
+        <p:spPr>
+          <a:xfrm>
+            <a:off x="2845156" y="4590288"/>
+            <a:ext cx="1197864" cy="1535723"/>
+          </a:xfrm>
+          <a:prstGeom prst="rect">
+            <a:avLst/>
+          </a:prstGeom>
+        </p:spPr>
+      </p:pic>
+      <p:pic>
+        <p:nvPicPr>
+          <p:cNvPr id="25" name="Image 3" descr="/home/user/pgs/presentation/strip3.jpg">    </p:cNvPr>
+          <p:cNvPicPr>
+            <a:picLocks noChangeAspect="1"/>
+          </p:cNvPicPr>
+          <p:nvPr/>
+        </p:nvPicPr>
+        <p:blipFill>
+          <a:blip r:embed="rId4"/>
+          <a:stretch>
+            <a:fillRect/>
+          </a:stretch>
+        </p:blipFill>
+        <p:spPr>
+          <a:xfrm>
+            <a:off x="4171036" y="4590288"/>
+            <a:ext cx="1197864" cy="1535723"/>
+          </a:xfrm>
+          <a:prstGeom prst="rect">
+            <a:avLst/>
+          </a:prstGeom>
+        </p:spPr>
+      </p:pic>
+      <p:pic>
+        <p:nvPicPr>
+          <p:cNvPr id="26" name="Image 4" descr="/home/user/pgs/presentation/strip4.jpg">    </p:cNvPr>
+          <p:cNvPicPr>
+            <a:picLocks noChangeAspect="1"/>
+          </p:cNvPicPr>
+          <p:nvPr/>
+        </p:nvPicPr>
+        <p:blipFill>
+          <a:blip r:embed="rId5"/>
+          <a:stretch>
+            <a:fillRect/>
+          </a:stretch>
+        </p:blipFill>
+        <p:spPr>
+          <a:xfrm>
+            <a:off x="5496916" y="4590288"/>
+            <a:ext cx="1197864" cy="1535723"/>
+          </a:xfrm>
+          <a:prstGeom prst="rect">
+            <a:avLst/>
+          </a:prstGeom>
+        </p:spPr>
+      </p:pic>
+      <p:pic>
+        <p:nvPicPr>
+          <p:cNvPr id="27" name="Image 5" descr="/home/user/pgs/presentation/strip5.jpg">    </p:cNvPr>
+          <p:cNvPicPr>
+            <a:picLocks noChangeAspect="1"/>
+          </p:cNvPicPr>
+          <p:nvPr/>
+        </p:nvPicPr>
+        <p:blipFill>
+          <a:blip r:embed="rId6"/>
+          <a:stretch>
+            <a:fillRect/>
+          </a:stretch>
+        </p:blipFill>
+        <p:spPr>
+          <a:xfrm>
+            <a:off x="6822796" y="4590288"/>
+            <a:ext cx="1197864" cy="1535723"/>
+          </a:xfrm>
+          <a:prstGeom prst="rect">
+            <a:avLst/>
+          </a:prstGeom>
+        </p:spPr>
+      </p:pic>
+      <p:pic>
+        <p:nvPicPr>
+          <p:cNvPr id="28" name="Image 6" descr="/home/user/pgs/presentation/strip6.jpg">    </p:cNvPr>
+          <p:cNvPicPr>
+            <a:picLocks noChangeAspect="1"/>
+          </p:cNvPicPr>
+          <p:nvPr/>
+        </p:nvPicPr>
+        <p:blipFill>
+          <a:blip r:embed="rId7"/>
+          <a:stretch>
+            <a:fillRect/>
+          </a:stretch>
+        </p:blipFill>
+        <p:spPr>
+          <a:xfrm>
+            <a:off x="8148676" y="4590288"/>
+            <a:ext cx="1197864" cy="1535723"/>
+          </a:xfrm>
+          <a:prstGeom prst="rect">
+            <a:avLst/>
+          </a:prstGeom>
+        </p:spPr>
+      </p:pic>
+      <p:pic>
+        <p:nvPicPr>
+          <p:cNvPr id="29" name="Image 7" descr="/home/user/pgs/presentation/strip7.jpg">    </p:cNvPr>
+          <p:cNvPicPr>
+            <a:picLocks noChangeAspect="1"/>
+          </p:cNvPicPr>
+          <p:nvPr/>
+        </p:nvPicPr>
+        <p:blipFill>
+          <a:blip r:embed="rId8"/>
+          <a:stretch>
+            <a:fillRect/>
+          </a:stretch>
+        </p:blipFill>
+        <p:spPr>
+          <a:xfrm>
+            <a:off x="9474556" y="4590288"/>
+            <a:ext cx="1197864" cy="1535723"/>
+          </a:xfrm>
+          <a:prstGeom prst="rect">
+            <a:avLst/>
+          </a:prstGeom>
+        </p:spPr>
+      </p:pic>
+      <p:sp>
+        <p:nvSpPr>
+          <p:cNvPr id="30" name="Text 20"/>
+          <p:cNvSpPr txBox="1"/>
+          <p:nvPr/>
+        </p:nvSpPr>
+        <p:spPr>
+          <a:xfrm>
+            <a:off x="777240" y="6199632"/>
+            <a:ext cx="10637215" cy="310896"/>
+          </a:xfrm>
+          <a:prstGeom prst="rect">
+            <a:avLst/>
+          </a:prstGeom>
+          <a:noFill/>
+          <a:ln/>
+        </p:spPr>
+        <p:txBody>
+          <a:bodyPr wrap="square" lIns="0" tIns="0" rIns="0" bIns="0" rtlCol="0" anchor="t"/>
+          <a:lstStyle/>
+          <a:p>
+            <a:pPr algn="ctr" indent="0" marL="0">
+              <a:buNone/>
+            </a:pPr>
+            <a:r>
+              <a:rPr lang="en-US" sz="1100" i="1" dirty="0">
+                <a:solidFill>
+                  <a:srgbClr val="8A877F"/>
+                </a:solidFill>
+                <a:latin typeface="Calibri" pitchFamily="34" charset="0"/>
+                <a:ea typeface="Calibri" pitchFamily="34" charset="-122"/>
+                <a:cs typeface="Calibri" pitchFamily="34" charset="-120"/>
+              </a:rPr>
+              <a:t>Seven of the eighty-one, as photographed — different days, light, distance and backgrounds, and one bird facing away.</a:t>
+            </a:r>
+            <a:endParaRPr lang="en-US" sz="1100" dirty="0"/>
+          </a:p>
+        </p:txBody>
+      </p:sp>
     </p:spTree>
   </p:cSld>
   <p:clrMapOvr>
@@ -8322,7 +8682,7 @@
       </p:sp>
       <p:pic>
         <p:nvPicPr>
-          <p:cNvPr id="14" name="Image 0" descr="/tmp/claude-0/-home-user-pgs/4a5325c7-76e4-5bb8-8cfc-4bd4c3ab42b2/scratchpad/fig/06_leakage_random_vs_session.jpg">    </p:cNvPr>
+          <p:cNvPr id="14" name="Image 0" descr="/home/user/pgs/presentation/fig/06_leakage_random_vs_session.jpg">    </p:cNvPr>
           <p:cNvPicPr>
             <a:picLocks noChangeAspect="1"/>
           </p:cNvPicPr>
@@ -9304,7 +9664,7 @@
       </p:sp>
       <p:pic>
         <p:nvPicPr>
-          <p:cNvPr id="4" name="Image 0" descr="/tmp/claude-0/-home-user-pgs/4a5325c7-76e4-5bb8-8cfc-4bd4c3ab42b2/scratchpad/fig/12_loss_x_augmentation.jpg">    </p:cNvPr>
+          <p:cNvPr id="4" name="Image 0" descr="/home/user/pgs/presentation/fig/12_loss_x_augmentation.jpg">    </p:cNvPr>
           <p:cNvPicPr>
             <a:picLocks noChangeAspect="1"/>
           </p:cNvPicPr>
@@ -10188,7 +10548,7 @@
       </p:sp>
       <p:pic>
         <p:nvPicPr>
-          <p:cNvPr id="12" name="Image 0" descr="/tmp/claude-0/-home-user-pgs/4a5325c7-76e4-5bb8-8cfc-4bd4c3ab42b2/scratchpad/fig/10_open_set_dir_far.jpg">    </p:cNvPr>
+          <p:cNvPr id="12" name="Image 0" descr="/home/user/pgs/presentation/fig/10_open_set_dir_far.jpg">    </p:cNvPr>
           <p:cNvPicPr>
             <a:picLocks noChangeAspect="1"/>
           </p:cNvPicPr>
